--- a/Foundation_F4/Guided_Practice/F4-L05_Practice_Room_Giving_Reasons_Why.pptx
+++ b/Foundation_F4/Guided_Practice/F4-L05_Practice_Room_Giving_Reasons_Why.pptx
@@ -14856,11 +14856,11 @@
           <a:bodyPr wrap="square" lIns="0" tIns="0" rIns="0" bIns="0" rtlCol="0" anchor="ctr"/>
           <a:lstStyle/>
           <a:p>
-            <a:pPr algn="l" indent="0" marL="0">
-              <a:buNone/>
-            </a:pPr>
-            <a:r>
-              <a:rPr lang="ar-SA" altLang="en-US" sz="2000" b="1" dirty="0">
+            <a:pPr rtl="1" algn="r" indent="0" marL="0">
+              <a:buNone/>
+            </a:pPr>
+            <a:r>
+              <a:rPr lang="ar-SA" altLang="en-US" sz="1600" b="1" dirty="0">
                 <a:solidFill>
                   <a:srgbClr val="1B3B6F"/>
                 </a:solidFill>
@@ -14868,333 +14868,9 @@
                 <a:ea typeface="Amiri" pitchFamily="2" charset="-78"/>
                 <a:cs typeface="Amiri" pitchFamily="2" charset="-78"/>
               </a:rPr>
-              <a:t>لِأَنَّهُ</a:t>
-            </a:r>
-            <a:pPr algn="l" indent="0" marL="0">
-              <a:buNone/>
-            </a:pPr>
-            <a:r>
-              <a:rPr lang="en-US" sz="1550" b="1" dirty="0">
-                <a:solidFill>
-                  <a:srgbClr val="1B3B6F"/>
-                </a:solidFill>
-                <a:latin typeface="Calibri" pitchFamily="34" charset="0"/>
-                <a:cs typeface="Amiri" pitchFamily="2" charset="-78"/>
-              </a:rPr>
-              <a:t> · </a:t>
-            </a:r>
-            <a:pPr algn="l" indent="0" marL="0">
-              <a:buNone/>
-            </a:pPr>
-            <a:r>
-              <a:rPr lang="ar-SA" altLang="en-US" sz="2000" b="1" dirty="0">
-                <a:solidFill>
-                  <a:srgbClr val="1B3B6F"/>
-                </a:solidFill>
-                <a:latin typeface="Amiri" pitchFamily="2" charset="-78"/>
-                <a:ea typeface="Amiri" pitchFamily="2" charset="-78"/>
-                <a:cs typeface="Amiri" pitchFamily="2" charset="-78"/>
-              </a:rPr>
-              <a:t>لِأَنَّهَا</a:t>
-            </a:r>
-            <a:pPr algn="l" indent="0" marL="0">
-              <a:buNone/>
-            </a:pPr>
-            <a:r>
-              <a:rPr lang="en-US" sz="1550" b="1" dirty="0">
-                <a:solidFill>
-                  <a:srgbClr val="1B3B6F"/>
-                </a:solidFill>
-                <a:latin typeface="Calibri" pitchFamily="34" charset="0"/>
-                <a:cs typeface="Amiri" pitchFamily="2" charset="-78"/>
-              </a:rPr>
-              <a:t>  ·  </a:t>
-            </a:r>
-            <a:pPr algn="l" indent="0" marL="0">
-              <a:buNone/>
-            </a:pPr>
-            <a:r>
-              <a:rPr lang="ar-SA" altLang="en-US" sz="2000" b="1" dirty="0">
-                <a:solidFill>
-                  <a:srgbClr val="1B3B6F"/>
-                </a:solidFill>
-                <a:latin typeface="Amiri" pitchFamily="2" charset="-78"/>
-                <a:ea typeface="Amiri" pitchFamily="2" charset="-78"/>
-                <a:cs typeface="Amiri" pitchFamily="2" charset="-78"/>
-              </a:rPr>
-              <a:t>لِأَنَّنِي</a:t>
-            </a:r>
-            <a:pPr algn="l" indent="0" marL="0">
-              <a:buNone/>
-            </a:pPr>
-            <a:r>
-              <a:rPr lang="en-US" sz="1550" b="1" dirty="0">
-                <a:solidFill>
-                  <a:srgbClr val="1B3B6F"/>
-                </a:solidFill>
-                <a:latin typeface="Calibri" pitchFamily="34" charset="0"/>
-                <a:cs typeface="Amiri" pitchFamily="2" charset="-78"/>
-              </a:rPr>
-              <a:t>  ·  </a:t>
-            </a:r>
-            <a:pPr algn="l" indent="0" marL="0">
-              <a:buNone/>
-            </a:pPr>
-            <a:r>
-              <a:rPr lang="ar-SA" altLang="en-US" sz="2000" b="1" dirty="0">
-                <a:solidFill>
-                  <a:srgbClr val="1B3B6F"/>
-                </a:solidFill>
-                <a:latin typeface="Amiri" pitchFamily="2" charset="-78"/>
-                <a:ea typeface="Amiri" pitchFamily="2" charset="-78"/>
-                <a:cs typeface="Amiri" pitchFamily="2" charset="-78"/>
-              </a:rPr>
-              <a:t>لِأَنَّ</a:t>
-            </a:r>
-            <a:pPr algn="l" indent="0" marL="0">
-              <a:buNone/>
-            </a:pPr>
-            <a:r>
-              <a:rPr lang="en-US" sz="1550" b="1" dirty="0">
-                <a:solidFill>
-                  <a:srgbClr val="1B3B6F"/>
-                </a:solidFill>
-                <a:latin typeface="Calibri" pitchFamily="34" charset="0"/>
-                <a:cs typeface="Amiri" pitchFamily="2" charset="-78"/>
-              </a:rPr>
-              <a:t> + noun  ·  </a:t>
-            </a:r>
-            <a:pPr algn="l" indent="0" marL="0">
-              <a:buNone/>
-            </a:pPr>
-            <a:r>
-              <a:rPr lang="ar-SA" altLang="en-US" sz="2000" b="1" dirty="0">
-                <a:solidFill>
-                  <a:srgbClr val="1B3B6F"/>
-                </a:solidFill>
-                <a:latin typeface="Amiri" pitchFamily="2" charset="-78"/>
-                <a:ea typeface="Amiri" pitchFamily="2" charset="-78"/>
-                <a:cs typeface="Amiri" pitchFamily="2" charset="-78"/>
-              </a:rPr>
-              <a:t>سَهْلٌ</a:t>
-            </a:r>
-            <a:pPr algn="l" indent="0" marL="0">
-              <a:buNone/>
-            </a:pPr>
-            <a:r>
-              <a:rPr lang="en-US" sz="1550" b="1" dirty="0">
-                <a:solidFill>
-                  <a:srgbClr val="1B3B6F"/>
-                </a:solidFill>
-                <a:latin typeface="Calibri" pitchFamily="34" charset="0"/>
-                <a:cs typeface="Amiri" pitchFamily="2" charset="-78"/>
-              </a:rPr>
-              <a:t> · </a:t>
-            </a:r>
-            <a:pPr algn="l" indent="0" marL="0">
-              <a:buNone/>
-            </a:pPr>
-            <a:r>
-              <a:rPr lang="ar-SA" altLang="en-US" sz="2000" b="1" dirty="0">
-                <a:solidFill>
-                  <a:srgbClr val="1B3B6F"/>
-                </a:solidFill>
-                <a:latin typeface="Amiri" pitchFamily="2" charset="-78"/>
-                <a:ea typeface="Amiri" pitchFamily="2" charset="-78"/>
-                <a:cs typeface="Amiri" pitchFamily="2" charset="-78"/>
-              </a:rPr>
-              <a:t>صَعْبٌ</a:t>
-            </a:r>
-            <a:pPr algn="l" indent="0" marL="0">
-              <a:buNone/>
-            </a:pPr>
-            <a:r>
-              <a:rPr lang="en-US" sz="1550" b="1" dirty="0">
-                <a:solidFill>
-                  <a:srgbClr val="1B3B6F"/>
-                </a:solidFill>
-                <a:latin typeface="Calibri" pitchFamily="34" charset="0"/>
-                <a:cs typeface="Amiri" pitchFamily="2" charset="-78"/>
-              </a:rPr>
-              <a:t>  ·  </a:t>
-            </a:r>
-            <a:pPr algn="l" indent="0" marL="0">
-              <a:buNone/>
-            </a:pPr>
-            <a:r>
-              <a:rPr lang="ar-SA" altLang="en-US" sz="2000" b="1" dirty="0">
-                <a:solidFill>
-                  <a:srgbClr val="1B3B6F"/>
-                </a:solidFill>
-                <a:latin typeface="Amiri" pitchFamily="2" charset="-78"/>
-                <a:ea typeface="Amiri" pitchFamily="2" charset="-78"/>
-                <a:cs typeface="Amiri" pitchFamily="2" charset="-78"/>
-              </a:rPr>
-              <a:t>مُهِمٌّ</a:t>
-            </a:r>
-            <a:pPr algn="l" indent="0" marL="0">
-              <a:buNone/>
-            </a:pPr>
-            <a:r>
-              <a:rPr lang="en-US" sz="1550" b="1" dirty="0">
-                <a:solidFill>
-                  <a:srgbClr val="1B3B6F"/>
-                </a:solidFill>
-                <a:latin typeface="Calibri" pitchFamily="34" charset="0"/>
-                <a:cs typeface="Amiri" pitchFamily="2" charset="-78"/>
-              </a:rPr>
-              <a:t> · </a:t>
-            </a:r>
-            <a:pPr algn="l" indent="0" marL="0">
-              <a:buNone/>
-            </a:pPr>
-            <a:r>
-              <a:rPr lang="ar-SA" altLang="en-US" sz="2000" b="1" dirty="0">
-                <a:solidFill>
-                  <a:srgbClr val="1B3B6F"/>
-                </a:solidFill>
-                <a:latin typeface="Amiri" pitchFamily="2" charset="-78"/>
-                <a:ea typeface="Amiri" pitchFamily="2" charset="-78"/>
-                <a:cs typeface="Amiri" pitchFamily="2" charset="-78"/>
-              </a:rPr>
-              <a:t>مُفِيدٌ</a:t>
-            </a:r>
-            <a:pPr algn="l" indent="0" marL="0">
-              <a:buNone/>
-            </a:pPr>
-            <a:r>
-              <a:rPr lang="en-US" sz="1550" b="1" dirty="0">
-                <a:solidFill>
-                  <a:srgbClr val="1B3B6F"/>
-                </a:solidFill>
-                <a:latin typeface="Calibri" pitchFamily="34" charset="0"/>
-                <a:cs typeface="Amiri" pitchFamily="2" charset="-78"/>
-              </a:rPr>
-              <a:t>  ·  </a:t>
-            </a:r>
-            <a:pPr algn="l" indent="0" marL="0">
-              <a:buNone/>
-            </a:pPr>
-            <a:r>
-              <a:rPr lang="ar-SA" altLang="en-US" sz="2000" b="1" dirty="0">
-                <a:solidFill>
-                  <a:srgbClr val="1B3B6F"/>
-                </a:solidFill>
-                <a:latin typeface="Amiri" pitchFamily="2" charset="-78"/>
-                <a:ea typeface="Amiri" pitchFamily="2" charset="-78"/>
-                <a:cs typeface="Amiri" pitchFamily="2" charset="-78"/>
-              </a:rPr>
-              <a:t>وَاضِحٌ</a:t>
-            </a:r>
-            <a:pPr algn="l" indent="0" marL="0">
-              <a:buNone/>
-            </a:pPr>
-            <a:r>
-              <a:rPr lang="en-US" sz="1550" b="1" dirty="0">
-                <a:solidFill>
-                  <a:srgbClr val="1B3B6F"/>
-                </a:solidFill>
-                <a:latin typeface="Calibri" pitchFamily="34" charset="0"/>
-                <a:cs typeface="Amiri" pitchFamily="2" charset="-78"/>
-              </a:rPr>
-              <a:t> · </a:t>
-            </a:r>
-            <a:pPr algn="l" indent="0" marL="0">
-              <a:buNone/>
-            </a:pPr>
-            <a:r>
-              <a:rPr lang="ar-SA" altLang="en-US" sz="2000" b="1" dirty="0">
-                <a:solidFill>
-                  <a:srgbClr val="1B3B6F"/>
-                </a:solidFill>
-                <a:latin typeface="Amiri" pitchFamily="2" charset="-78"/>
-                <a:ea typeface="Amiri" pitchFamily="2" charset="-78"/>
-                <a:cs typeface="Amiri" pitchFamily="2" charset="-78"/>
-              </a:rPr>
-              <a:t>مُنَظَّمٌ</a:t>
-            </a:r>
-            <a:pPr algn="l" indent="0" marL="0">
-              <a:buNone/>
-            </a:pPr>
-            <a:r>
-              <a:rPr lang="en-US" sz="1550" b="1" dirty="0">
-                <a:solidFill>
-                  <a:srgbClr val="1B3B6F"/>
-                </a:solidFill>
-                <a:latin typeface="Calibri" pitchFamily="34" charset="0"/>
-                <a:cs typeface="Amiri" pitchFamily="2" charset="-78"/>
-              </a:rPr>
-              <a:t>  ·  </a:t>
-            </a:r>
-            <a:pPr algn="l" indent="0" marL="0">
-              <a:buNone/>
-            </a:pPr>
-            <a:r>
-              <a:rPr lang="ar-SA" altLang="en-US" sz="2000" b="1" dirty="0">
-                <a:solidFill>
-                  <a:srgbClr val="1B3B6F"/>
-                </a:solidFill>
-                <a:latin typeface="Amiri" pitchFamily="2" charset="-78"/>
-                <a:ea typeface="Amiri" pitchFamily="2" charset="-78"/>
-                <a:cs typeface="Amiri" pitchFamily="2" charset="-78"/>
-              </a:rPr>
-              <a:t>شَيِّقٌ</a:t>
-            </a:r>
-            <a:pPr algn="l" indent="0" marL="0">
-              <a:buNone/>
-            </a:pPr>
-            <a:r>
-              <a:rPr lang="en-US" sz="1550" b="1" dirty="0">
-                <a:solidFill>
-                  <a:srgbClr val="1B3B6F"/>
-                </a:solidFill>
-                <a:latin typeface="Calibri" pitchFamily="34" charset="0"/>
-                <a:cs typeface="Amiri" pitchFamily="2" charset="-78"/>
-              </a:rPr>
-              <a:t> · </a:t>
-            </a:r>
-            <a:pPr algn="l" indent="0" marL="0">
-              <a:buNone/>
-            </a:pPr>
-            <a:r>
-              <a:rPr lang="ar-SA" altLang="en-US" sz="2000" b="1" dirty="0">
-                <a:solidFill>
-                  <a:srgbClr val="1B3B6F"/>
-                </a:solidFill>
-                <a:latin typeface="Amiri" pitchFamily="2" charset="-78"/>
-                <a:ea typeface="Amiri" pitchFamily="2" charset="-78"/>
-                <a:cs typeface="Amiri" pitchFamily="2" charset="-78"/>
-              </a:rPr>
-              <a:t>مُمِلٌّ</a:t>
-            </a:r>
-            <a:pPr algn="l" indent="0" marL="0">
-              <a:buNone/>
-            </a:pPr>
-            <a:r>
-              <a:rPr lang="en-US" sz="1550" b="1" dirty="0">
-                <a:solidFill>
-                  <a:srgbClr val="1B3B6F"/>
-                </a:solidFill>
-                <a:latin typeface="Calibri" pitchFamily="34" charset="0"/>
-                <a:cs typeface="Amiri" pitchFamily="2" charset="-78"/>
-              </a:rPr>
-              <a:t>  ·  </a:t>
-            </a:r>
-            <a:pPr algn="l" indent="0" marL="0">
-              <a:buNone/>
-            </a:pPr>
-            <a:r>
-              <a:rPr lang="ar-SA" altLang="en-US" sz="2000" b="1" dirty="0">
-                <a:solidFill>
-                  <a:srgbClr val="1B3B6F"/>
-                </a:solidFill>
-                <a:latin typeface="Amiri" pitchFamily="2" charset="-78"/>
-                <a:ea typeface="Amiri" pitchFamily="2" charset="-78"/>
-                <a:cs typeface="Amiri" pitchFamily="2" charset="-78"/>
-              </a:rPr>
-              <a:t>لٰكِنَّ</a:t>
-            </a:r>
-            <a:endParaRPr lang="en-US" sz="1550" dirty="0"/>
+              <a:t>لِأَنَّهُ · لِأَنَّهَا  ·  لِأَنَّنِي  ·  لِأَنَّ الطَّقْسَ …  ·  سَهْلٌ · صَعْبٌ  ·  مُهِمٌّ · مُفِيدٌ  ·  وَاضِحٌ · مُنَظَّمٌ  ·  شَيِّقٌ · مُمِلٌّ  ·  لٰكِنَّ</a:t>
+            </a:r>
+            <a:endParaRPr lang="ar-SA" sz="1600" dirty="0"/>
           </a:p>
         </p:txBody>
       </p:sp>
